--- a/Documents/SDU/fagråd/plakater/pptx/IMADA_SKAKTURN_VINDERE.pptx
+++ b/Documents/SDU/fagråd/plakater/pptx/IMADA_SKAKTURN_VINDERE.pptx
@@ -115,6 +115,14 @@
 </p:presentation>
 </file>
 
+<file path=ppt/revisionInfo.xml><?xml version="1.0" encoding="utf-8"?>
+<p1510:revInfo xmlns:a="http://schemas.openxmlformats.org/drawingml/2006/main" xmlns:r="http://schemas.openxmlformats.org/officeDocument/2006/relationships" xmlns:p1510="http://schemas.microsoft.com/office/powerpoint/2015/10/main">
+  <p1510:revLst>
+    <p1510:client id="{9E0C62CB-8701-8A43-8710-8485CA73049A}" v="53" dt="2025-11-12T16:30:29.828"/>
+  </p1510:revLst>
+</p1510:revInfo>
+</file>
+
 <file path=ppt/notesMasters/notesMaster1.xml><?xml version="1.0" encoding="utf-8"?>
 <p:notesMaster xmlns:a="http://schemas.openxmlformats.org/drawingml/2006/main" xmlns:r="http://schemas.openxmlformats.org/officeDocument/2006/relationships" xmlns:p="http://schemas.openxmlformats.org/presentationml/2006/main">
   <p:cSld>
@@ -197,7 +205,7 @@
           <a:p>
             <a:fld id="{B07987E8-53A3-47B5-8F48-50EB5178F685}" type="datetimeFigureOut">
               <a:rPr lang="da-DK" smtClean="0"/>
-              <a:t>12.11.2025</a:t>
+              <a:t>22.02.2026</a:t>
             </a:fld>
             <a:endParaRPr lang="da-DK"/>
           </a:p>
@@ -697,7 +705,7 @@
           <a:p>
             <a:fld id="{7CAF6849-F4B2-44D2-B8FB-E45FA684ADCF}" type="datetimeFigureOut">
               <a:rPr lang="da-DK" smtClean="0"/>
-              <a:t>12.11.2025</a:t>
+              <a:t>22.02.2026</a:t>
             </a:fld>
             <a:endParaRPr lang="da-DK"/>
           </a:p>
@@ -897,7 +905,7 @@
           <a:p>
             <a:fld id="{7CAF6849-F4B2-44D2-B8FB-E45FA684ADCF}" type="datetimeFigureOut">
               <a:rPr lang="da-DK" smtClean="0"/>
-              <a:t>12.11.2025</a:t>
+              <a:t>22.02.2026</a:t>
             </a:fld>
             <a:endParaRPr lang="da-DK"/>
           </a:p>
@@ -1107,7 +1115,7 @@
           <a:p>
             <a:fld id="{7CAF6849-F4B2-44D2-B8FB-E45FA684ADCF}" type="datetimeFigureOut">
               <a:rPr lang="da-DK" smtClean="0"/>
-              <a:t>12.11.2025</a:t>
+              <a:t>22.02.2026</a:t>
             </a:fld>
             <a:endParaRPr lang="da-DK"/>
           </a:p>
@@ -1307,7 +1315,7 @@
           <a:p>
             <a:fld id="{7CAF6849-F4B2-44D2-B8FB-E45FA684ADCF}" type="datetimeFigureOut">
               <a:rPr lang="da-DK" smtClean="0"/>
-              <a:t>12.11.2025</a:t>
+              <a:t>22.02.2026</a:t>
             </a:fld>
             <a:endParaRPr lang="da-DK"/>
           </a:p>
@@ -1583,7 +1591,7 @@
           <a:p>
             <a:fld id="{7CAF6849-F4B2-44D2-B8FB-E45FA684ADCF}" type="datetimeFigureOut">
               <a:rPr lang="da-DK" smtClean="0"/>
-              <a:t>12.11.2025</a:t>
+              <a:t>22.02.2026</a:t>
             </a:fld>
             <a:endParaRPr lang="da-DK"/>
           </a:p>
@@ -1851,7 +1859,7 @@
           <a:p>
             <a:fld id="{7CAF6849-F4B2-44D2-B8FB-E45FA684ADCF}" type="datetimeFigureOut">
               <a:rPr lang="da-DK" smtClean="0"/>
-              <a:t>12.11.2025</a:t>
+              <a:t>22.02.2026</a:t>
             </a:fld>
             <a:endParaRPr lang="da-DK"/>
           </a:p>
@@ -2266,7 +2274,7 @@
           <a:p>
             <a:fld id="{7CAF6849-F4B2-44D2-B8FB-E45FA684ADCF}" type="datetimeFigureOut">
               <a:rPr lang="da-DK" smtClean="0"/>
-              <a:t>12.11.2025</a:t>
+              <a:t>22.02.2026</a:t>
             </a:fld>
             <a:endParaRPr lang="da-DK"/>
           </a:p>
@@ -2408,7 +2416,7 @@
           <a:p>
             <a:fld id="{7CAF6849-F4B2-44D2-B8FB-E45FA684ADCF}" type="datetimeFigureOut">
               <a:rPr lang="da-DK" smtClean="0"/>
-              <a:t>12.11.2025</a:t>
+              <a:t>22.02.2026</a:t>
             </a:fld>
             <a:endParaRPr lang="da-DK"/>
           </a:p>
@@ -2521,7 +2529,7 @@
           <a:p>
             <a:fld id="{7CAF6849-F4B2-44D2-B8FB-E45FA684ADCF}" type="datetimeFigureOut">
               <a:rPr lang="da-DK" smtClean="0"/>
-              <a:t>12.11.2025</a:t>
+              <a:t>22.02.2026</a:t>
             </a:fld>
             <a:endParaRPr lang="da-DK"/>
           </a:p>
@@ -2834,7 +2842,7 @@
           <a:p>
             <a:fld id="{7CAF6849-F4B2-44D2-B8FB-E45FA684ADCF}" type="datetimeFigureOut">
               <a:rPr lang="da-DK" smtClean="0"/>
-              <a:t>12.11.2025</a:t>
+              <a:t>22.02.2026</a:t>
             </a:fld>
             <a:endParaRPr lang="da-DK"/>
           </a:p>
@@ -3123,7 +3131,7 @@
           <a:p>
             <a:fld id="{7CAF6849-F4B2-44D2-B8FB-E45FA684ADCF}" type="datetimeFigureOut">
               <a:rPr lang="da-DK" smtClean="0"/>
-              <a:t>12.11.2025</a:t>
+              <a:t>22.02.2026</a:t>
             </a:fld>
             <a:endParaRPr lang="da-DK"/>
           </a:p>
@@ -3378,7 +3386,7 @@
           <a:p>
             <a:fld id="{7CAF6849-F4B2-44D2-B8FB-E45FA684ADCF}" type="datetimeFigureOut">
               <a:rPr lang="da-DK" smtClean="0"/>
-              <a:t>12.11.2025</a:t>
+              <a:t>22.02.2026</a:t>
             </a:fld>
             <a:endParaRPr lang="da-DK"/>
           </a:p>
@@ -3830,19 +3838,7 @@
             <a:avLst/>
           </a:prstGeom>
           <a:blipFill>
-            <a:blip r:embed="rId4">
-              <a:extLst>
-                <a:ext uri="{BEBA8EAE-BF5A-486C-A8C5-ECC9F3942E4B}">
-                  <a14:imgProps xmlns:a14="http://schemas.microsoft.com/office/drawing/2010/main">
-                    <a14:imgLayer r:embed="rId5">
-                      <a14:imgEffect>
-                        <a14:brightnessContrast contrast="-20000"/>
-                      </a14:imgEffect>
-                    </a14:imgLayer>
-                  </a14:imgProps>
-                </a:ext>
-              </a:extLst>
-            </a:blip>
+            <a:blip r:embed="rId4"/>
             <a:stretch>
               <a:fillRect/>
             </a:stretch>
@@ -3947,7 +3943,7 @@
             <a:avLst/>
           </a:prstGeom>
           <a:blipFill dpi="0" rotWithShape="1">
-            <a:blip r:embed="rId6"/>
+            <a:blip r:embed="rId5"/>
             <a:srcRect/>
             <a:stretch>
               <a:fillRect/>
@@ -3979,11 +3975,11 @@
           <p:nvPr/>
         </p:nvPicPr>
         <p:blipFill rotWithShape="1">
-          <a:blip r:embed="rId7">
+          <a:blip r:embed="rId6">
             <a:extLst>
               <a:ext uri="{BEBA8EAE-BF5A-486C-A8C5-ECC9F3942E4B}">
                 <a14:imgProps xmlns:a14="http://schemas.microsoft.com/office/drawing/2010/main">
-                  <a14:imgLayer r:embed="rId8">
+                  <a14:imgLayer r:embed="rId7">
                     <a14:imgEffect>
                       <a14:backgroundRemoval t="817" b="97876" l="1404" r="97732">
                         <a14:foregroundMark x1="66415" y1="21569" x2="65443" y2="49346"/>
@@ -4127,7 +4123,7 @@
         </p:nvSpPr>
         <p:spPr bwMode="auto">
           <a:xfrm>
-            <a:off x="-6958185" y="10539413"/>
+            <a:off x="-8721708" y="10539413"/>
             <a:ext cx="304800" cy="304800"/>
           </a:xfrm>
           <a:prstGeom prst="rect">
@@ -4171,10 +4167,10 @@
           <p:nvPr/>
         </p:nvPicPr>
         <p:blipFill>
-          <a:blip r:embed="rId9">
+          <a:blip r:embed="rId8">
             <a:extLst>
               <a:ext uri="{96DAC541-7B7A-43D3-8B79-37D633B846F1}">
-                <asvg:svgBlip xmlns:asvg="http://schemas.microsoft.com/office/drawing/2016/SVG/main" r:embed="rId10"/>
+                <asvg:svgBlip xmlns:asvg="http://schemas.microsoft.com/office/drawing/2016/SVG/main" r:embed="rId9"/>
               </a:ext>
             </a:extLst>
           </a:blip>
@@ -4207,10 +4203,10 @@
           <p:nvPr/>
         </p:nvPicPr>
         <p:blipFill>
-          <a:blip r:embed="rId11">
+          <a:blip r:embed="rId10">
             <a:extLst>
               <a:ext uri="{96DAC541-7B7A-43D3-8B79-37D633B846F1}">
-                <asvg:svgBlip xmlns:asvg="http://schemas.microsoft.com/office/drawing/2016/SVG/main" r:embed="rId12"/>
+                <asvg:svgBlip xmlns:asvg="http://schemas.microsoft.com/office/drawing/2016/SVG/main" r:embed="rId11"/>
               </a:ext>
             </a:extLst>
           </a:blip>
@@ -4295,11 +4291,11 @@
           <p:nvPr/>
         </p:nvPicPr>
         <p:blipFill>
-          <a:blip r:embed="rId13">
+          <a:blip r:embed="rId12">
             <a:extLst>
               <a:ext uri="{BEBA8EAE-BF5A-486C-A8C5-ECC9F3942E4B}">
                 <a14:imgProps xmlns:a14="http://schemas.microsoft.com/office/drawing/2010/main">
-                  <a14:imgLayer r:embed="rId14">
+                  <a14:imgLayer r:embed="rId13">
                     <a14:imgEffect>
                       <a14:backgroundRemoval t="1628" b="89974" l="9961" r="97363">
                         <a14:foregroundMark x1="33789" y1="11719" x2="35156" y2="5469"/>
@@ -4500,7 +4496,7 @@
         </p:nvSpPr>
         <p:spPr>
           <a:xfrm>
-            <a:off x="1106369" y="3972544"/>
+            <a:off x="-1593280" y="3972544"/>
             <a:ext cx="10902460" cy="769441"/>
           </a:xfrm>
           <a:prstGeom prst="rect">
@@ -4514,6 +4510,7 @@
           </a:bodyPr>
           <a:lstStyle/>
           <a:p>
+            <a:pPr algn="ctr"/>
             <a:r>
               <a:rPr lang="da-DK" sz="4400" b="1" spc="-300" dirty="0">
                 <a:solidFill>
@@ -4523,7 +4520,7 @@
                   </a:schemeClr>
                 </a:solidFill>
               </a:rPr>
-              <a:t>2025  –  Karl  Korsdal Hansen</a:t>
+              <a:t>2025  –  Fornavn Efternavn </a:t>
             </a:r>
             <a:endParaRPr lang="da-DK" sz="500" dirty="0"/>
           </a:p>
@@ -4543,7 +4540,7 @@
         </p:nvSpPr>
         <p:spPr>
           <a:xfrm>
-            <a:off x="-15678839" y="4543333"/>
+            <a:off x="-17442362" y="4543333"/>
             <a:ext cx="10902460" cy="769441"/>
           </a:xfrm>
           <a:prstGeom prst="rect">
@@ -4557,6 +4554,7 @@
           </a:bodyPr>
           <a:lstStyle/>
           <a:p>
+            <a:pPr algn="ctr"/>
             <a:r>
               <a:rPr lang="da-DK" sz="4400" b="1" spc="-300" dirty="0">
                 <a:solidFill>
@@ -4586,7 +4584,7 @@
         </p:nvSpPr>
         <p:spPr>
           <a:xfrm>
-            <a:off x="-15678839" y="5112605"/>
+            <a:off x="-17442362" y="5112605"/>
             <a:ext cx="10902460" cy="769441"/>
           </a:xfrm>
           <a:prstGeom prst="rect">
@@ -4600,6 +4598,7 @@
           </a:bodyPr>
           <a:lstStyle/>
           <a:p>
+            <a:pPr algn="ctr"/>
             <a:r>
               <a:rPr lang="da-DK" sz="4400" b="1" spc="-300" dirty="0">
                 <a:solidFill>
@@ -4629,7 +4628,7 @@
         </p:nvSpPr>
         <p:spPr>
           <a:xfrm>
-            <a:off x="-15678839" y="5683394"/>
+            <a:off x="-17442362" y="5683394"/>
             <a:ext cx="10902460" cy="769441"/>
           </a:xfrm>
           <a:prstGeom prst="rect">
@@ -4643,6 +4642,7 @@
           </a:bodyPr>
           <a:lstStyle/>
           <a:p>
+            <a:pPr algn="ctr"/>
             <a:r>
               <a:rPr lang="da-DK" sz="4400" b="1" spc="-300" dirty="0">
                 <a:solidFill>
@@ -4672,7 +4672,7 @@
         </p:nvSpPr>
         <p:spPr>
           <a:xfrm>
-            <a:off x="-15678839" y="6246731"/>
+            <a:off x="-17442362" y="6246731"/>
             <a:ext cx="10902460" cy="769441"/>
           </a:xfrm>
           <a:prstGeom prst="rect">
@@ -4686,6 +4686,7 @@
           </a:bodyPr>
           <a:lstStyle/>
           <a:p>
+            <a:pPr algn="ctr"/>
             <a:r>
               <a:rPr lang="da-DK" sz="4400" b="1" spc="-300" dirty="0">
                 <a:solidFill>
@@ -4715,7 +4716,7 @@
         </p:nvSpPr>
         <p:spPr>
           <a:xfrm>
-            <a:off x="-15678839" y="6817520"/>
+            <a:off x="-17442362" y="6817520"/>
             <a:ext cx="10902460" cy="769441"/>
           </a:xfrm>
           <a:prstGeom prst="rect">
@@ -4729,6 +4730,7 @@
           </a:bodyPr>
           <a:lstStyle/>
           <a:p>
+            <a:pPr algn="ctr"/>
             <a:r>
               <a:rPr lang="da-DK" sz="4400" b="1" spc="-300" dirty="0">
                 <a:solidFill>
@@ -4758,7 +4760,7 @@
         </p:nvSpPr>
         <p:spPr>
           <a:xfrm>
-            <a:off x="-15678839" y="7386792"/>
+            <a:off x="-17442362" y="7386792"/>
             <a:ext cx="10902460" cy="769441"/>
           </a:xfrm>
           <a:prstGeom prst="rect">
@@ -4772,6 +4774,7 @@
           </a:bodyPr>
           <a:lstStyle/>
           <a:p>
+            <a:pPr algn="ctr"/>
             <a:r>
               <a:rPr lang="da-DK" sz="4400" b="1" spc="-300" dirty="0">
                 <a:solidFill>
@@ -4801,7 +4804,7 @@
         </p:nvSpPr>
         <p:spPr>
           <a:xfrm>
-            <a:off x="-15678839" y="7957581"/>
+            <a:off x="-17442362" y="7957581"/>
             <a:ext cx="10902460" cy="769441"/>
           </a:xfrm>
           <a:prstGeom prst="rect">
@@ -4815,6 +4818,7 @@
           </a:bodyPr>
           <a:lstStyle/>
           <a:p>
+            <a:pPr algn="ctr"/>
             <a:r>
               <a:rPr lang="da-DK" sz="4400" b="1" spc="-300" dirty="0">
                 <a:solidFill>
@@ -4844,7 +4848,7 @@
         </p:nvSpPr>
         <p:spPr>
           <a:xfrm>
-            <a:off x="-15678839" y="8531590"/>
+            <a:off x="-17442362" y="8531590"/>
             <a:ext cx="10902460" cy="769441"/>
           </a:xfrm>
           <a:prstGeom prst="rect">
@@ -4858,6 +4862,7 @@
           </a:bodyPr>
           <a:lstStyle/>
           <a:p>
+            <a:pPr algn="ctr"/>
             <a:r>
               <a:rPr lang="da-DK" sz="4400" b="1" spc="-300" dirty="0">
                 <a:solidFill>
@@ -4887,7 +4892,7 @@
         </p:nvSpPr>
         <p:spPr>
           <a:xfrm>
-            <a:off x="-15678839" y="9100862"/>
+            <a:off x="-17442362" y="9100862"/>
             <a:ext cx="10902460" cy="769441"/>
           </a:xfrm>
           <a:prstGeom prst="rect">
@@ -4901,6 +4906,7 @@
           </a:bodyPr>
           <a:lstStyle/>
           <a:p>
+            <a:pPr algn="ctr"/>
             <a:r>
               <a:rPr lang="da-DK" sz="4400" b="1" spc="-300" dirty="0">
                 <a:solidFill>
@@ -4930,7 +4936,7 @@
         </p:nvSpPr>
         <p:spPr>
           <a:xfrm>
-            <a:off x="-15678839" y="9671651"/>
+            <a:off x="-17442362" y="9671651"/>
             <a:ext cx="10902460" cy="769441"/>
           </a:xfrm>
           <a:prstGeom prst="rect">
@@ -4944,6 +4950,7 @@
           </a:bodyPr>
           <a:lstStyle/>
           <a:p>
+            <a:pPr algn="ctr"/>
             <a:r>
               <a:rPr lang="da-DK" sz="4400" b="1" spc="-300" dirty="0">
                 <a:solidFill>
@@ -4973,7 +4980,7 @@
         </p:nvSpPr>
         <p:spPr>
           <a:xfrm>
-            <a:off x="-15678839" y="10234988"/>
+            <a:off x="-17442362" y="10234988"/>
             <a:ext cx="10902460" cy="769441"/>
           </a:xfrm>
           <a:prstGeom prst="rect">
@@ -4987,6 +4994,7 @@
           </a:bodyPr>
           <a:lstStyle/>
           <a:p>
+            <a:pPr algn="ctr"/>
             <a:r>
               <a:rPr lang="da-DK" sz="4400" b="1" spc="-300" dirty="0">
                 <a:solidFill>
@@ -5016,7 +5024,7 @@
         </p:nvSpPr>
         <p:spPr>
           <a:xfrm>
-            <a:off x="-15678839" y="10805777"/>
+            <a:off x="-17442362" y="10805777"/>
             <a:ext cx="10902460" cy="769441"/>
           </a:xfrm>
           <a:prstGeom prst="rect">
@@ -5030,6 +5038,7 @@
           </a:bodyPr>
           <a:lstStyle/>
           <a:p>
+            <a:pPr algn="ctr"/>
             <a:r>
               <a:rPr lang="da-DK" sz="4400" b="1" spc="-300" dirty="0">
                 <a:solidFill>
@@ -5059,7 +5068,7 @@
         </p:nvSpPr>
         <p:spPr>
           <a:xfrm>
-            <a:off x="-15678839" y="11375049"/>
+            <a:off x="-17442362" y="11375049"/>
             <a:ext cx="10902460" cy="769441"/>
           </a:xfrm>
           <a:prstGeom prst="rect">
@@ -5073,6 +5082,7 @@
           </a:bodyPr>
           <a:lstStyle/>
           <a:p>
+            <a:pPr algn="ctr"/>
             <a:r>
               <a:rPr lang="da-DK" sz="4400" b="1" spc="-300" dirty="0">
                 <a:solidFill>
@@ -5102,7 +5112,7 @@
         </p:nvSpPr>
         <p:spPr>
           <a:xfrm>
-            <a:off x="-15678839" y="11945838"/>
+            <a:off x="-17442362" y="11945838"/>
             <a:ext cx="10902460" cy="769441"/>
           </a:xfrm>
           <a:prstGeom prst="rect">
@@ -5116,6 +5126,7 @@
           </a:bodyPr>
           <a:lstStyle/>
           <a:p>
+            <a:pPr algn="ctr"/>
             <a:r>
               <a:rPr lang="da-DK" sz="4400" b="1" spc="-300" dirty="0">
                 <a:solidFill>
@@ -5145,7 +5156,7 @@
         </p:nvSpPr>
         <p:spPr>
           <a:xfrm>
-            <a:off x="-15678839" y="12515110"/>
+            <a:off x="-17442362" y="12515110"/>
             <a:ext cx="10902460" cy="769441"/>
           </a:xfrm>
           <a:prstGeom prst="rect">
@@ -5159,6 +5170,7 @@
           </a:bodyPr>
           <a:lstStyle/>
           <a:p>
+            <a:pPr algn="ctr"/>
             <a:r>
               <a:rPr lang="da-DK" sz="4400" b="1" spc="-300" dirty="0">
                 <a:solidFill>
@@ -5188,7 +5200,7 @@
         </p:nvSpPr>
         <p:spPr>
           <a:xfrm>
-            <a:off x="-15678839" y="13084382"/>
+            <a:off x="-17442362" y="13084382"/>
             <a:ext cx="10902460" cy="769441"/>
           </a:xfrm>
           <a:prstGeom prst="rect">
@@ -5202,6 +5214,7 @@
           </a:bodyPr>
           <a:lstStyle/>
           <a:p>
+            <a:pPr algn="ctr"/>
             <a:r>
               <a:rPr lang="da-DK" sz="4400" b="1" spc="-300" dirty="0">
                 <a:solidFill>
@@ -5231,7 +5244,7 @@
         </p:nvSpPr>
         <p:spPr>
           <a:xfrm>
-            <a:off x="-15678839" y="13655171"/>
+            <a:off x="-17442362" y="13655171"/>
             <a:ext cx="10902460" cy="769441"/>
           </a:xfrm>
           <a:prstGeom prst="rect">
@@ -5245,6 +5258,7 @@
           </a:bodyPr>
           <a:lstStyle/>
           <a:p>
+            <a:pPr algn="ctr"/>
             <a:r>
               <a:rPr lang="da-DK" sz="4400" b="1" spc="-300" dirty="0">
                 <a:solidFill>
@@ -5274,7 +5288,7 @@
         </p:nvSpPr>
         <p:spPr>
           <a:xfrm>
-            <a:off x="-15678839" y="14218508"/>
+            <a:off x="-17442362" y="14218508"/>
             <a:ext cx="10902460" cy="769441"/>
           </a:xfrm>
           <a:prstGeom prst="rect">
@@ -5288,6 +5302,7 @@
           </a:bodyPr>
           <a:lstStyle/>
           <a:p>
+            <a:pPr algn="ctr"/>
             <a:r>
               <a:rPr lang="da-DK" sz="4400" b="1" spc="-300" dirty="0">
                 <a:solidFill>
@@ -5317,7 +5332,7 @@
         </p:nvSpPr>
         <p:spPr>
           <a:xfrm>
-            <a:off x="-15678839" y="14789297"/>
+            <a:off x="-17442362" y="14789297"/>
             <a:ext cx="10902460" cy="769441"/>
           </a:xfrm>
           <a:prstGeom prst="rect">
@@ -5331,6 +5346,7 @@
           </a:bodyPr>
           <a:lstStyle/>
           <a:p>
+            <a:pPr algn="ctr"/>
             <a:r>
               <a:rPr lang="da-DK" sz="4400" b="1" spc="-300" dirty="0">
                 <a:solidFill>
@@ -5360,7 +5376,7 @@
         </p:nvSpPr>
         <p:spPr>
           <a:xfrm>
-            <a:off x="-15678839" y="15358569"/>
+            <a:off x="-17442362" y="15358569"/>
             <a:ext cx="10902460" cy="769441"/>
           </a:xfrm>
           <a:prstGeom prst="rect">
@@ -5374,6 +5390,7 @@
           </a:bodyPr>
           <a:lstStyle/>
           <a:p>
+            <a:pPr algn="ctr"/>
             <a:r>
               <a:rPr lang="da-DK" sz="4400" b="1" spc="-300" dirty="0">
                 <a:solidFill>
@@ -5403,7 +5420,7 @@
         </p:nvSpPr>
         <p:spPr>
           <a:xfrm>
-            <a:off x="-15678839" y="15929358"/>
+            <a:off x="-17442362" y="15929358"/>
             <a:ext cx="10902460" cy="769441"/>
           </a:xfrm>
           <a:prstGeom prst="rect">
@@ -5417,6 +5434,7 @@
           </a:bodyPr>
           <a:lstStyle/>
           <a:p>
+            <a:pPr algn="ctr"/>
             <a:r>
               <a:rPr lang="da-DK" sz="4400" b="1" spc="-300" dirty="0">
                 <a:solidFill>
@@ -5446,7 +5464,7 @@
         </p:nvSpPr>
         <p:spPr>
           <a:xfrm>
-            <a:off x="-8491643" y="3972544"/>
+            <a:off x="-10255166" y="3972544"/>
             <a:ext cx="10902460" cy="769441"/>
           </a:xfrm>
           <a:prstGeom prst="rect">
@@ -5460,6 +5478,7 @@
           </a:bodyPr>
           <a:lstStyle/>
           <a:p>
+            <a:pPr algn="ctr"/>
             <a:r>
               <a:rPr lang="da-DK" sz="4400" b="1" spc="-300" dirty="0">
                 <a:solidFill>
@@ -5489,7 +5508,7 @@
         </p:nvSpPr>
         <p:spPr>
           <a:xfrm>
-            <a:off x="-8491643" y="4541816"/>
+            <a:off x="-10255166" y="4541816"/>
             <a:ext cx="10902460" cy="769441"/>
           </a:xfrm>
           <a:prstGeom prst="rect">
@@ -5503,6 +5522,7 @@
           </a:bodyPr>
           <a:lstStyle/>
           <a:p>
+            <a:pPr algn="ctr"/>
             <a:r>
               <a:rPr lang="da-DK" sz="4400" b="1" spc="-300" dirty="0">
                 <a:solidFill>
@@ -5532,7 +5552,7 @@
         </p:nvSpPr>
         <p:spPr>
           <a:xfrm>
-            <a:off x="-8491643" y="5112605"/>
+            <a:off x="-10255166" y="5112605"/>
             <a:ext cx="10902460" cy="769441"/>
           </a:xfrm>
           <a:prstGeom prst="rect">
@@ -5546,6 +5566,7 @@
           </a:bodyPr>
           <a:lstStyle/>
           <a:p>
+            <a:pPr algn="ctr"/>
             <a:r>
               <a:rPr lang="da-DK" sz="4400" b="1" spc="-300" dirty="0">
                 <a:solidFill>
@@ -5575,7 +5596,7 @@
         </p:nvSpPr>
         <p:spPr>
           <a:xfrm>
-            <a:off x="-8491643" y="5675942"/>
+            <a:off x="-10255166" y="5675942"/>
             <a:ext cx="10902460" cy="769441"/>
           </a:xfrm>
           <a:prstGeom prst="rect">
@@ -5589,6 +5610,7 @@
           </a:bodyPr>
           <a:lstStyle/>
           <a:p>
+            <a:pPr algn="ctr"/>
             <a:r>
               <a:rPr lang="da-DK" sz="4400" b="1" spc="-300" dirty="0">
                 <a:solidFill>
@@ -5618,7 +5640,7 @@
         </p:nvSpPr>
         <p:spPr>
           <a:xfrm>
-            <a:off x="-8491643" y="6246731"/>
+            <a:off x="-10255166" y="6246731"/>
             <a:ext cx="10902460" cy="769441"/>
           </a:xfrm>
           <a:prstGeom prst="rect">
@@ -5632,6 +5654,7 @@
           </a:bodyPr>
           <a:lstStyle/>
           <a:p>
+            <a:pPr algn="ctr"/>
             <a:r>
               <a:rPr lang="da-DK" sz="4400" b="1" spc="-300" dirty="0">
                 <a:solidFill>
@@ -5661,7 +5684,7 @@
         </p:nvSpPr>
         <p:spPr>
           <a:xfrm>
-            <a:off x="-8491643" y="6816003"/>
+            <a:off x="-10255166" y="6816003"/>
             <a:ext cx="10902460" cy="769441"/>
           </a:xfrm>
           <a:prstGeom prst="rect">
@@ -5675,6 +5698,7 @@
           </a:bodyPr>
           <a:lstStyle/>
           <a:p>
+            <a:pPr algn="ctr"/>
             <a:r>
               <a:rPr lang="da-DK" sz="4400" b="1" spc="-300" dirty="0">
                 <a:solidFill>
@@ -5704,7 +5728,7 @@
         </p:nvSpPr>
         <p:spPr>
           <a:xfrm>
-            <a:off x="-8491643" y="7386792"/>
+            <a:off x="-10255166" y="7386792"/>
             <a:ext cx="10902460" cy="769441"/>
           </a:xfrm>
           <a:prstGeom prst="rect">
@@ -5718,6 +5742,7 @@
           </a:bodyPr>
           <a:lstStyle/>
           <a:p>
+            <a:pPr algn="ctr"/>
             <a:r>
               <a:rPr lang="da-DK" sz="4400" b="1" spc="-300" dirty="0">
                 <a:solidFill>
@@ -5747,7 +5772,7 @@
         </p:nvSpPr>
         <p:spPr>
           <a:xfrm>
-            <a:off x="-8491643" y="7962810"/>
+            <a:off x="-10255166" y="7962810"/>
             <a:ext cx="10902460" cy="769441"/>
           </a:xfrm>
           <a:prstGeom prst="rect">
@@ -5761,6 +5786,7 @@
           </a:bodyPr>
           <a:lstStyle/>
           <a:p>
+            <a:pPr algn="ctr"/>
             <a:r>
               <a:rPr lang="da-DK" sz="4400" b="1" spc="-300" dirty="0">
                 <a:solidFill>
@@ -5790,7 +5816,7 @@
         </p:nvSpPr>
         <p:spPr>
           <a:xfrm>
-            <a:off x="-8491643" y="8532082"/>
+            <a:off x="-10255166" y="8532082"/>
             <a:ext cx="10902460" cy="769441"/>
           </a:xfrm>
           <a:prstGeom prst="rect">
@@ -5804,6 +5830,7 @@
           </a:bodyPr>
           <a:lstStyle/>
           <a:p>
+            <a:pPr algn="ctr"/>
             <a:r>
               <a:rPr lang="da-DK" sz="4400" b="1" spc="-300" dirty="0">
                 <a:solidFill>
@@ -5833,7 +5860,7 @@
         </p:nvSpPr>
         <p:spPr>
           <a:xfrm>
-            <a:off x="-8491643" y="9102871"/>
+            <a:off x="-10255166" y="9102871"/>
             <a:ext cx="10902460" cy="769441"/>
           </a:xfrm>
           <a:prstGeom prst="rect">
@@ -5847,6 +5874,7 @@
           </a:bodyPr>
           <a:lstStyle/>
           <a:p>
+            <a:pPr algn="ctr"/>
             <a:r>
               <a:rPr lang="da-DK" sz="4400" b="1" spc="-300" dirty="0">
                 <a:solidFill>
@@ -5876,7 +5904,7 @@
         </p:nvSpPr>
         <p:spPr>
           <a:xfrm>
-            <a:off x="-8491643" y="9666208"/>
+            <a:off x="-10255166" y="9666208"/>
             <a:ext cx="10902460" cy="769441"/>
           </a:xfrm>
           <a:prstGeom prst="rect">
@@ -5890,6 +5918,7 @@
           </a:bodyPr>
           <a:lstStyle/>
           <a:p>
+            <a:pPr algn="ctr"/>
             <a:r>
               <a:rPr lang="da-DK" sz="4400" b="1" spc="-300" dirty="0">
                 <a:solidFill>
@@ -5919,7 +5948,7 @@
         </p:nvSpPr>
         <p:spPr>
           <a:xfrm>
-            <a:off x="-8491643" y="10236997"/>
+            <a:off x="-10255166" y="10236997"/>
             <a:ext cx="10902460" cy="769441"/>
           </a:xfrm>
           <a:prstGeom prst="rect">
@@ -5933,6 +5962,7 @@
           </a:bodyPr>
           <a:lstStyle/>
           <a:p>
+            <a:pPr algn="ctr"/>
             <a:r>
               <a:rPr lang="da-DK" sz="4400" b="1" spc="-300" dirty="0">
                 <a:solidFill>
@@ -5962,7 +5992,7 @@
         </p:nvSpPr>
         <p:spPr>
           <a:xfrm>
-            <a:off x="-8491643" y="10806269"/>
+            <a:off x="-10255166" y="10806269"/>
             <a:ext cx="10902460" cy="769441"/>
           </a:xfrm>
           <a:prstGeom prst="rect">
@@ -5976,6 +6006,7 @@
           </a:bodyPr>
           <a:lstStyle/>
           <a:p>
+            <a:pPr algn="ctr"/>
             <a:r>
               <a:rPr lang="da-DK" sz="4400" b="1" spc="-300" dirty="0">
                 <a:solidFill>
@@ -6005,7 +6036,7 @@
         </p:nvSpPr>
         <p:spPr>
           <a:xfrm>
-            <a:off x="-8491643" y="11377058"/>
+            <a:off x="-10255166" y="11377058"/>
             <a:ext cx="10902460" cy="769441"/>
           </a:xfrm>
           <a:prstGeom prst="rect">
@@ -6019,6 +6050,7 @@
           </a:bodyPr>
           <a:lstStyle/>
           <a:p>
+            <a:pPr algn="ctr"/>
             <a:r>
               <a:rPr lang="da-DK" sz="4400" b="1" spc="-300" dirty="0">
                 <a:solidFill>
@@ -6048,7 +6080,7 @@
         </p:nvSpPr>
         <p:spPr>
           <a:xfrm>
-            <a:off x="-15678839" y="16538996"/>
+            <a:off x="-17442362" y="16538996"/>
             <a:ext cx="10902460" cy="769441"/>
           </a:xfrm>
           <a:prstGeom prst="rect">
@@ -6062,6 +6094,7 @@
           </a:bodyPr>
           <a:lstStyle/>
           <a:p>
+            <a:pPr algn="ctr"/>
             <a:r>
               <a:rPr lang="da-DK" sz="4400" b="1" spc="-300" dirty="0">
                 <a:solidFill>
